--- a/a7/packages/A7 Unit 6 - Relationships in Triangles/Lessons/6.03/A7 6.03 Pythagorean Theorem - Slides.pptx
+++ b/a7/packages/A7 Unit 6 - Relationships in Triangles/Lessons/6.03/A7 6.03 Pythagorean Theorem - Slides.pptx
@@ -4381,7 +4381,7 @@
       </p:sp>
       <p:pic>
         <p:nvPicPr>
-          <p:cNvPr id="9" name="Picture 8" descr="g314373f1c6e44b6c.png"/>
+          <p:cNvPr id="9" name="Picture 8" descr="g1605b09377360d9a.png"/>
           <p:cNvPicPr>
             <a:picLocks noChangeAspect="1"/>
           </p:cNvPicPr>
@@ -4395,8 +4395,8 @@
         </p:blipFill>
         <p:spPr>
           <a:xfrm>
-            <a:off x="5166359" y="2276458"/>
-            <a:ext cx="1828800" cy="2597386"/>
+            <a:off x="5175503" y="2276458"/>
+            <a:ext cx="1810512" cy="2552393"/>
           </a:xfrm>
           <a:prstGeom prst="rect">
             <a:avLst/>
@@ -4411,7 +4411,7 @@
         </p:nvSpPr>
         <p:spPr>
           <a:xfrm>
-            <a:off x="777240" y="5203029"/>
+            <a:off x="777240" y="5158035"/>
             <a:ext cx="10607040" cy="429370"/>
           </a:xfrm>
           <a:prstGeom prst="rect">
@@ -15625,7 +15625,7 @@
       </p:cxnSp>
       <p:pic>
         <p:nvPicPr>
-          <p:cNvPr id="10" name="Picture 9" descr="gd52f9f29f97d9dec.png"/>
+          <p:cNvPr id="10" name="Picture 9" descr="g58aa5bffac20af42.png"/>
           <p:cNvPicPr>
             <a:picLocks noChangeAspect="1"/>
           </p:cNvPicPr>
@@ -15639,8 +15639,8 @@
         </p:blipFill>
         <p:spPr>
           <a:xfrm>
-            <a:off x="3968496" y="1993392"/>
-            <a:ext cx="4224528" cy="2199719"/>
+            <a:off x="3973068" y="1993392"/>
+            <a:ext cx="4215384" cy="2194957"/>
           </a:xfrm>
           <a:prstGeom prst="rect">
             <a:avLst/>
@@ -15663,7 +15663,7 @@
         </p:blipFill>
         <p:spPr>
           <a:xfrm>
-            <a:off x="987552" y="4385135"/>
+            <a:off x="987552" y="4380373"/>
             <a:ext cx="1929384" cy="341376"/>
           </a:xfrm>
           <a:prstGeom prst="rect">
@@ -15679,7 +15679,7 @@
         </p:nvSpPr>
         <p:spPr>
           <a:xfrm>
-            <a:off x="987552" y="5070935"/>
+            <a:off x="987552" y="5066173"/>
             <a:ext cx="10131551" cy="950976"/>
           </a:xfrm>
           <a:prstGeom prst="rect">

--- a/a7/packages/A7 Unit 6 - Relationships in Triangles/Lessons/6.03/A7 6.03 Pythagorean Theorem - Slides.pptx
+++ b/a7/packages/A7 Unit 6 - Relationships in Triangles/Lessons/6.03/A7 6.03 Pythagorean Theorem - Slides.pptx
@@ -3695,7 +3695,7 @@
                 </a:solidFill>
                 <a:latin typeface="Lexend"/>
               </a:rPr>
-              <a:t>A right triangle has legs of 5 in and 11 in.</a:t>
+              <a:t>A right triangle has legs of 5 inches and 11 inches.</a:t>
             </a:r>
           </a:p>
         </p:txBody>
@@ -3993,7 +3993,7 @@
                 </a:solidFill>
                 <a:latin typeface="Lexend"/>
               </a:rPr>
-              <a:t>A right triangle has legs of 5 in and 11 in.</a:t>
+              <a:t>A right triangle has legs of 5 inches and 11 inches.</a:t>
             </a:r>
           </a:p>
         </p:txBody>
@@ -4374,14 +4374,14 @@
                 </a:solidFill>
                 <a:latin typeface="Lexend"/>
               </a:rPr>
-              <a:t>A right triangle has a hypotenuse of 26 m and one leg of 24 m.</a:t>
+              <a:t>A right triangle has a hypotenuse of 15 m and one leg of 8 m.</a:t>
             </a:r>
           </a:p>
         </p:txBody>
       </p:sp>
       <p:pic>
         <p:nvPicPr>
-          <p:cNvPr id="9" name="Picture 8" descr="g1605b09377360d9a.png"/>
+          <p:cNvPr id="9" name="Picture 8" descr="g8750fe113f51c075.png"/>
           <p:cNvPicPr>
             <a:picLocks noChangeAspect="1"/>
           </p:cNvPicPr>
@@ -4395,8 +4395,8 @@
         </p:blipFill>
         <p:spPr>
           <a:xfrm>
-            <a:off x="5175503" y="2276458"/>
-            <a:ext cx="1810512" cy="2552393"/>
+            <a:off x="4251959" y="2276458"/>
+            <a:ext cx="3657600" cy="2368175"/>
           </a:xfrm>
           <a:prstGeom prst="rect">
             <a:avLst/>
@@ -4411,7 +4411,7 @@
         </p:nvSpPr>
         <p:spPr>
           <a:xfrm>
-            <a:off x="777240" y="5158035"/>
+            <a:off x="777240" y="4973817"/>
             <a:ext cx="10607040" cy="429370"/>
           </a:xfrm>
           <a:prstGeom prst="rect">
@@ -4433,7 +4433,7 @@
                 </a:solidFill>
                 <a:latin typeface="Lexend"/>
               </a:rPr>
-              <a:t>How long is the other leg?</a:t>
+              <a:t>How long is the other leg? Give it exactly and to the nearest tenth.</a:t>
             </a:r>
           </a:p>
         </p:txBody>
@@ -4668,7 +4668,7 @@
       </p:sp>
       <p:pic>
         <p:nvPicPr>
-          <p:cNvPr id="8" name="Picture 7" descr="d9d154ca61db8bf5.png"/>
+          <p:cNvPr id="8" name="Picture 7" descr="e1792e0d9e277524.png"/>
           <p:cNvPicPr>
             <a:picLocks noChangeAspect="1"/>
           </p:cNvPicPr>
@@ -4683,7 +4683,7 @@
         <p:spPr>
           <a:xfrm>
             <a:off x="1828800" y="1920240"/>
-            <a:ext cx="2316480" cy="341376"/>
+            <a:ext cx="2075688" cy="341376"/>
           </a:xfrm>
           <a:prstGeom prst="rect">
             <a:avLst/>
@@ -4692,7 +4692,7 @@
       </p:pic>
       <p:pic>
         <p:nvPicPr>
-          <p:cNvPr id="9" name="Picture 8" descr="fafc9a58f3fff9c3.png"/>
+          <p:cNvPr id="9" name="Picture 8" descr="7647180d4d2d7172.png"/>
           <p:cNvPicPr>
             <a:picLocks noChangeAspect="1"/>
           </p:cNvPicPr>
@@ -4707,7 +4707,7 @@
         <p:spPr>
           <a:xfrm>
             <a:off x="1828800" y="2535936"/>
-            <a:ext cx="3422904" cy="341376"/>
+            <a:ext cx="3166872" cy="341376"/>
           </a:xfrm>
           <a:prstGeom prst="rect">
             <a:avLst/>
@@ -4716,7 +4716,7 @@
       </p:pic>
       <p:pic>
         <p:nvPicPr>
-          <p:cNvPr id="10" name="Picture 9" descr="2f21362e83d94f64.png"/>
+          <p:cNvPr id="10" name="Picture 9" descr="b3458a8a85ef4996.png"/>
           <p:cNvPicPr>
             <a:picLocks noChangeAspect="1"/>
           </p:cNvPicPr>
@@ -4731,7 +4731,7 @@
         <p:spPr>
           <a:xfrm>
             <a:off x="1828800" y="3151632"/>
-            <a:ext cx="2468880" cy="478536"/>
+            <a:ext cx="2682240" cy="478536"/>
           </a:xfrm>
           <a:prstGeom prst="rect">
             <a:avLst/>
@@ -4768,7 +4768,7 @@
                 </a:solidFill>
                 <a:latin typeface="Lexend"/>
               </a:rPr>
-              <a:t>Answer:   b = 10 m</a:t>
+              <a:t>Answer:   b = √161 m ≈ 12.7 m</a:t>
             </a:r>
           </a:p>
         </p:txBody>
@@ -6472,7 +6472,7 @@
                 </a:solidFill>
                 <a:latin typeface="Lexend"/>
               </a:rPr>
-              <a:t>A right triangle has legs of 4 in and 9 in.</a:t>
+              <a:t>A right triangle has legs of 4 inches and 9 inches.</a:t>
             </a:r>
           </a:p>
         </p:txBody>
@@ -6805,7 +6805,7 @@
                 </a:solidFill>
                 <a:latin typeface="Lexend"/>
               </a:rPr>
-              <a:t>A right triangle has legs of 4 in and 9 in.</a:t>
+              <a:t>A right triangle has legs of 4 inches and 9 inches.</a:t>
             </a:r>
           </a:p>
         </p:txBody>
@@ -7165,7 +7165,7 @@
         <p:spPr>
           <a:xfrm>
             <a:off x="1874519" y="1440180"/>
-            <a:ext cx="7515721" cy="457200"/>
+            <a:ext cx="9452490" cy="457200"/>
           </a:xfrm>
           <a:prstGeom prst="rect">
             <a:avLst/>
@@ -7186,7 +7186,7 @@
                 </a:solidFill>
                 <a:latin typeface="Lexend"/>
               </a:rPr>
-              <a:t>1.   Can sides of 4 in, 7 in and 12 in make a triangle?</a:t>
+              <a:t>1.   Can sides of 4 inches, 7 inches and 12 inches make a triangle?</a:t>
             </a:r>
           </a:p>
         </p:txBody>
@@ -9995,6 +9995,41 @@
         <p:spPr>
           <a:xfrm>
             <a:off x="1234440" y="1874519"/>
+            <a:ext cx="10058400" cy="858740"/>
+          </a:xfrm>
+          <a:prstGeom prst="rect">
+            <a:avLst/>
+          </a:prstGeom>
+          <a:noFill/>
+        </p:spPr>
+        <p:txBody>
+          <a:bodyPr wrap="square" lIns="45720" rIns="45720" tIns="18288" bIns="18288" anchor="t">
+            <a:spAutoFit/>
+          </a:bodyPr>
+          <a:lstStyle/>
+          <a:p>
+            <a:pPr algn="l"/>
+            <a:r>
+              <a:rPr sz="2280" b="0" i="0">
+                <a:solidFill>
+                  <a:srgbClr val="1A1A1A"/>
+                </a:solidFill>
+                <a:latin typeface="Lexend"/>
+              </a:rPr>
+              <a:t>A right triangle's hypotenuse is 20 inches; its legs are 16 inches and x.</a:t>
+            </a:r>
+          </a:p>
+        </p:txBody>
+      </p:sp>
+      <p:sp>
+        <p:nvSpPr>
+          <p:cNvPr id="9" name="TextBox 8"/>
+          <p:cNvSpPr txBox="1"/>
+          <p:nvPr/>
+        </p:nvSpPr>
+        <p:spPr>
+          <a:xfrm>
+            <a:off x="1234440" y="2842988"/>
             <a:ext cx="10058400" cy="429370"/>
           </a:xfrm>
           <a:prstGeom prst="rect">
@@ -10010,47 +10045,12 @@
           <a:p>
             <a:pPr algn="l"/>
             <a:r>
-              <a:rPr sz="2280" b="0" i="0">
+              <a:rPr sz="2280" b="1" i="0">
                 <a:solidFill>
                   <a:srgbClr val="1A1A1A"/>
                 </a:solidFill>
                 <a:latin typeface="Lexend"/>
               </a:rPr>
-              <a:t>A right triangle's hypotenuse is 20 in; its legs are 16 in and x.</a:t>
-            </a:r>
-          </a:p>
-        </p:txBody>
-      </p:sp>
-      <p:sp>
-        <p:nvSpPr>
-          <p:cNvPr id="9" name="TextBox 8"/>
-          <p:cNvSpPr txBox="1"/>
-          <p:nvPr/>
-        </p:nvSpPr>
-        <p:spPr>
-          <a:xfrm>
-            <a:off x="1234440" y="2413618"/>
-            <a:ext cx="10058400" cy="429370"/>
-          </a:xfrm>
-          <a:prstGeom prst="rect">
-            <a:avLst/>
-          </a:prstGeom>
-          <a:noFill/>
-        </p:spPr>
-        <p:txBody>
-          <a:bodyPr wrap="square" lIns="45720" rIns="45720" tIns="18288" bIns="18288" anchor="t">
-            <a:spAutoFit/>
-          </a:bodyPr>
-          <a:lstStyle/>
-          <a:p>
-            <a:pPr algn="l"/>
-            <a:r>
-              <a:rPr sz="2280" b="1" i="0">
-                <a:solidFill>
-                  <a:srgbClr val="1A1A1A"/>
-                </a:solidFill>
-                <a:latin typeface="Lexend"/>
-              </a:rPr>
               <a:t>Which equation finds x?</a:t>
             </a:r>
           </a:p>
@@ -10064,7 +10064,7 @@
         </p:nvSpPr>
         <p:spPr>
           <a:xfrm>
-            <a:off x="1691640" y="3144740"/>
+            <a:off x="1691640" y="3574111"/>
             <a:ext cx="594360" cy="457200"/>
           </a:xfrm>
           <a:prstGeom prst="rect">
@@ -10107,7 +10107,7 @@
         </p:blipFill>
         <p:spPr>
           <a:xfrm>
-            <a:off x="2258568" y="3135596"/>
+            <a:off x="2258568" y="3564967"/>
             <a:ext cx="1752600" cy="280416"/>
           </a:xfrm>
           <a:prstGeom prst="rect">
@@ -10123,7 +10123,7 @@
         </p:nvSpPr>
         <p:spPr>
           <a:xfrm>
-            <a:off x="6537959" y="3144740"/>
+            <a:off x="6537959" y="3574111"/>
             <a:ext cx="594360" cy="457200"/>
           </a:xfrm>
           <a:prstGeom prst="rect">
@@ -10166,7 +10166,7 @@
         </p:blipFill>
         <p:spPr>
           <a:xfrm>
-            <a:off x="7104888" y="3089876"/>
+            <a:off x="7104888" y="3519247"/>
             <a:ext cx="2246376" cy="341376"/>
           </a:xfrm>
           <a:prstGeom prst="rect">
@@ -10182,7 +10182,7 @@
         </p:nvSpPr>
         <p:spPr>
           <a:xfrm>
-            <a:off x="1691640" y="3757388"/>
+            <a:off x="1691640" y="4186759"/>
             <a:ext cx="594360" cy="457200"/>
           </a:xfrm>
           <a:prstGeom prst="rect">
@@ -10211,7 +10211,7 @@
       </p:sp>
       <p:pic>
         <p:nvPicPr>
-          <p:cNvPr id="15" name="Picture 14" descr="64ca13b55e11e65d.png"/>
+          <p:cNvPr id="15" name="Picture 14" descr="7f1c9e3a27973733.png"/>
           <p:cNvPicPr>
             <a:picLocks noChangeAspect="1"/>
           </p:cNvPicPr>
@@ -10225,8 +10225,8 @@
         </p:blipFill>
         <p:spPr>
           <a:xfrm>
-            <a:off x="2258568" y="3748244"/>
-            <a:ext cx="2874264" cy="280416"/>
+            <a:off x="2258568" y="4131895"/>
+            <a:ext cx="2535936" cy="341376"/>
           </a:xfrm>
           <a:prstGeom prst="rect">
             <a:avLst/>
@@ -10241,7 +10241,7 @@
         </p:nvSpPr>
         <p:spPr>
           <a:xfrm>
-            <a:off x="6537959" y="3757388"/>
+            <a:off x="6537959" y="4186759"/>
             <a:ext cx="594360" cy="457200"/>
           </a:xfrm>
           <a:prstGeom prst="rect">
@@ -10284,7 +10284,7 @@
         </p:blipFill>
         <p:spPr>
           <a:xfrm>
-            <a:off x="7104888" y="3702524"/>
+            <a:off x="7104888" y="4131895"/>
             <a:ext cx="2246376" cy="341376"/>
           </a:xfrm>
           <a:prstGeom prst="rect">
@@ -10300,7 +10300,7 @@
         </p:nvSpPr>
         <p:spPr>
           <a:xfrm>
-            <a:off x="777240" y="4434044"/>
+            <a:off x="777240" y="4863415"/>
             <a:ext cx="10607040" cy="457200"/>
           </a:xfrm>
           <a:prstGeom prst="rect">
@@ -10564,7 +10564,7 @@
         <p:spPr>
           <a:xfrm>
             <a:off x="1234440" y="1874519"/>
-            <a:ext cx="10058400" cy="429370"/>
+            <a:ext cx="10058400" cy="858740"/>
           </a:xfrm>
           <a:prstGeom prst="rect">
             <a:avLst/>
@@ -10585,7 +10585,7 @@
                 </a:solidFill>
                 <a:latin typeface="Lexend"/>
               </a:rPr>
-              <a:t>A right triangle's hypotenuse is 20 in; its legs are 16 in and x.</a:t>
+              <a:t>A right triangle's hypotenuse is 20 inches; its legs are 16 inches and x.</a:t>
             </a:r>
           </a:p>
         </p:txBody>
@@ -10598,7 +10598,7 @@
         </p:nvSpPr>
         <p:spPr>
           <a:xfrm>
-            <a:off x="1234440" y="2413618"/>
+            <a:off x="1234440" y="2842988"/>
             <a:ext cx="10058400" cy="429370"/>
           </a:xfrm>
           <a:prstGeom prst="rect">
@@ -10641,7 +10641,7 @@
         </p:blipFill>
         <p:spPr>
           <a:xfrm>
-            <a:off x="4556759" y="3116737"/>
+            <a:off x="4556759" y="3546107"/>
             <a:ext cx="3157728" cy="304800"/>
           </a:xfrm>
           <a:prstGeom prst="rect">
@@ -10665,7 +10665,7 @@
         </p:blipFill>
         <p:spPr>
           <a:xfrm>
-            <a:off x="4556759" y="3611084"/>
+            <a:off x="4556759" y="4040455"/>
             <a:ext cx="2225040" cy="432816"/>
           </a:xfrm>
           <a:prstGeom prst="rect">
@@ -11659,7 +11659,7 @@
         <p:spPr>
           <a:xfrm>
             <a:off x="1874519" y="1440180"/>
-            <a:ext cx="7515721" cy="457200"/>
+            <a:ext cx="9452490" cy="457200"/>
           </a:xfrm>
           <a:prstGeom prst="rect">
             <a:avLst/>
@@ -11680,7 +11680,7 @@
                 </a:solidFill>
                 <a:latin typeface="Lexend"/>
               </a:rPr>
-              <a:t>1.   Can sides of 4 in, 7 in and 12 in make a triangle?</a:t>
+              <a:t>1.   Can sides of 4 inches, 7 inches and 12 inches make a triangle?</a:t>
             </a:r>
           </a:p>
         </p:txBody>
@@ -12236,7 +12236,7 @@
                 </a:solidFill>
                 <a:latin typeface="Lexend"/>
               </a:rPr>
-              <a:t>A pennant is cut as a right triangle with legs of 8 in and 11 in. The fabric costs 6 dollars.</a:t>
+              <a:t>A pennant is cut as a right triangle with legs of 8 inches and 11 inches. The fabric costs 6 dollars.</a:t>
             </a:r>
           </a:p>
         </p:txBody>
@@ -12569,7 +12569,7 @@
                 </a:solidFill>
                 <a:latin typeface="Lexend"/>
               </a:rPr>
-              <a:t>A pennant is cut as a right triangle with legs of 8 in and 11 in. The fabric costs 6 dollars.</a:t>
+              <a:t>A pennant is cut as a right triangle with legs of 8 inches and 11 inches. The fabric costs 6 dollars.</a:t>
             </a:r>
           </a:p>
         </p:txBody>
@@ -14097,7 +14097,7 @@
                 </a:solidFill>
                 <a:latin typeface="Lexend"/>
               </a:rPr>
-              <a:t>A right triangle has a hypotenuse of 11 in and one leg of 4 in. How long is the other leg, exactly and to the nearest tenth?</a:t>
+              <a:t>A right triangle has a hypotenuse of 11 inches and one leg of 4 inches. How long is the other leg, exactly and to the nearest tenth?</a:t>
             </a:r>
           </a:p>
         </p:txBody>
@@ -14167,7 +14167,7 @@
                 </a:solidFill>
                 <a:latin typeface="Lexend"/>
               </a:rPr>
-              <a:t>A right triangle is drawn turned on its side. Its legs are 6 m and 11 m. How long is its hypotenuse, to the nearest tenth?</a:t>
+              <a:t>A right triangle has legs of 6 m and 11 m (drawn turned on its side on the paper). How long is its hypotenuse, to the nearest tenth?</a:t>
             </a:r>
           </a:p>
         </p:txBody>

--- a/a7/packages/A7 Unit 6 - Relationships in Triangles/Lessons/6.03/A7 6.03 Pythagorean Theorem - Slides.pptx
+++ b/a7/packages/A7 Unit 6 - Relationships in Triangles/Lessons/6.03/A7 6.03 Pythagorean Theorem - Slides.pptx
@@ -14675,7 +14675,7 @@
                 </a:solidFill>
                 <a:latin typeface="Lexend"/>
               </a:rPr>
-              <a:t>Every skill listed is required, to a SmartScore of 67. Due at the start of the next class.</a:t>
+              <a:t>Every skill listed is required, to a SmartScore of 67. Due by the Unit 6 test.</a:t>
             </a:r>
           </a:p>
         </p:txBody>

--- a/a7/packages/A7 Unit 6 - Relationships in Triangles/Lessons/6.03/A7 6.03 Pythagorean Theorem - Slides.pptx
+++ b/a7/packages/A7 Unit 6 - Relationships in Triangles/Lessons/6.03/A7 6.03 Pythagorean Theorem - Slides.pptx
@@ -4668,7 +4668,7 @@
       </p:sp>
       <p:pic>
         <p:nvPicPr>
-          <p:cNvPr id="8" name="Picture 7" descr="e1792e0d9e277524.png"/>
+          <p:cNvPr id="8" name="Picture 7" descr="5257ff6bba4bd927.png"/>
           <p:cNvPicPr>
             <a:picLocks noChangeAspect="1"/>
           </p:cNvPicPr>
@@ -4683,7 +4683,7 @@
         <p:spPr>
           <a:xfrm>
             <a:off x="1828800" y="1920240"/>
-            <a:ext cx="2075688" cy="341376"/>
+            <a:ext cx="6202680" cy="426720"/>
           </a:xfrm>
           <a:prstGeom prst="rect">
             <a:avLst/>
@@ -4692,7 +4692,7 @@
       </p:pic>
       <p:pic>
         <p:nvPicPr>
-          <p:cNvPr id="9" name="Picture 8" descr="7647180d4d2d7172.png"/>
+          <p:cNvPr id="9" name="Picture 8" descr="55d605791bfe3d19.png"/>
           <p:cNvPicPr>
             <a:picLocks noChangeAspect="1"/>
           </p:cNvPicPr>
@@ -4706,8 +4706,8 @@
         </p:blipFill>
         <p:spPr>
           <a:xfrm>
-            <a:off x="1828800" y="2535936"/>
-            <a:ext cx="3166872" cy="341376"/>
+            <a:off x="1828800" y="2621280"/>
+            <a:ext cx="5038344" cy="341376"/>
           </a:xfrm>
           <a:prstGeom prst="rect">
             <a:avLst/>
@@ -4716,7 +4716,7 @@
       </p:pic>
       <p:pic>
         <p:nvPicPr>
-          <p:cNvPr id="10" name="Picture 9" descr="b3458a8a85ef4996.png"/>
+          <p:cNvPr id="10" name="Picture 9" descr="68631f53d2ded9ab.png"/>
           <p:cNvPicPr>
             <a:picLocks noChangeAspect="1"/>
           </p:cNvPicPr>
@@ -4730,8 +4730,8 @@
         </p:blipFill>
         <p:spPr>
           <a:xfrm>
-            <a:off x="1828800" y="3151632"/>
-            <a:ext cx="2682240" cy="478536"/>
+            <a:off x="1828800" y="3236976"/>
+            <a:ext cx="6943344" cy="478536"/>
           </a:xfrm>
           <a:prstGeom prst="rect">
             <a:avLst/>
@@ -9254,7 +9254,7 @@
                 </a:solidFill>
                 <a:latin typeface="Lexend"/>
               </a:rPr>
-              <a:t>The right triangle is drawn turned. Its legs are 5 cm and 7 cm.</a:t>
+              <a:t>Two sides of this right triangle are 5 cm and 7 cm.</a:t>
             </a:r>
           </a:p>
         </p:txBody>
@@ -9289,7 +9289,7 @@
                 </a:solidFill>
                 <a:latin typeface="Lexend"/>
               </a:rPr>
-              <a:t>How long is the hypotenuse, to the nearest tenth?</a:t>
+              <a:t>How long is the third side, to the nearest tenth?</a:t>
             </a:r>
           </a:p>
         </p:txBody>
@@ -9611,7 +9611,7 @@
                 </a:solidFill>
                 <a:latin typeface="Lexend"/>
               </a:rPr>
-              <a:t>The right triangle is drawn turned. Its legs are 5 cm and 7 cm.</a:t>
+              <a:t>Two sides of this right triangle are 5 cm and 7 cm.</a:t>
             </a:r>
           </a:p>
         </p:txBody>
@@ -9646,7 +9646,7 @@
                 </a:solidFill>
                 <a:latin typeface="Lexend"/>
               </a:rPr>
-              <a:t>How long is the hypotenuse, to the nearest tenth?</a:t>
+              <a:t>How long is the third side, to the nearest tenth?</a:t>
             </a:r>
           </a:p>
         </p:txBody>
@@ -10211,7 +10211,7 @@
       </p:sp>
       <p:pic>
         <p:nvPicPr>
-          <p:cNvPr id="15" name="Picture 14" descr="7f1c9e3a27973733.png"/>
+          <p:cNvPr id="15" name="Picture 14" descr="6c12d63db14f4601.png"/>
           <p:cNvPicPr>
             <a:picLocks noChangeAspect="1"/>
           </p:cNvPicPr>
@@ -10226,7 +10226,7 @@
         <p:spPr>
           <a:xfrm>
             <a:off x="2258568" y="4131895"/>
-            <a:ext cx="2535936" cy="341376"/>
+            <a:ext cx="2087880" cy="341376"/>
           </a:xfrm>
           <a:prstGeom prst="rect">
             <a:avLst/>
@@ -10703,7 +10703,61 @@
                 </a:solidFill>
                 <a:latin typeface="Lexend"/>
               </a:rPr>
-              <a:t>Answer:   D — and x = 12 in</a:t>
+              <a:t>Answer:   D: 16</a:t>
+            </a:r>
+            <a:r>
+              <a:rPr sz="3040" b="1" i="0" baseline="30000">
+                <a:solidFill>
+                  <a:srgbClr val="9E1B32"/>
+                </a:solidFill>
+                <a:latin typeface="Lexend"/>
+              </a:rPr>
+              <a:t>2</a:t>
+            </a:r>
+            <a:r>
+              <a:rPr sz="3040" b="1" i="0">
+                <a:solidFill>
+                  <a:srgbClr val="9E1B32"/>
+                </a:solidFill>
+                <a:latin typeface="Lexend"/>
+              </a:rPr>
+              <a:t> + x</a:t>
+            </a:r>
+            <a:r>
+              <a:rPr sz="3040" b="1" i="0" baseline="30000">
+                <a:solidFill>
+                  <a:srgbClr val="9E1B32"/>
+                </a:solidFill>
+                <a:latin typeface="Lexend"/>
+              </a:rPr>
+              <a:t>2</a:t>
+            </a:r>
+            <a:r>
+              <a:rPr sz="3040" b="1" i="0">
+                <a:solidFill>
+                  <a:srgbClr val="9E1B32"/>
+                </a:solidFill>
+                <a:latin typeface="Lexend"/>
+              </a:rPr>
+              <a:t> = 20</a:t>
+            </a:r>
+            <a:r>
+              <a:rPr sz="3040" b="1" i="0" baseline="30000">
+                <a:solidFill>
+                  <a:srgbClr val="9E1B32"/>
+                </a:solidFill>
+                <a:latin typeface="Lexend"/>
+              </a:rPr>
+              <a:t>2</a:t>
+            </a:r>
+            <a:r>
+              <a:rPr sz="3040" b="1" i="0">
+                <a:solidFill>
+                  <a:srgbClr val="9E1B32"/>
+                </a:solidFill>
+                <a:latin typeface="Lexend"/>
+              </a:rPr>
+              <a:t>, so x = 12 in</a:t>
             </a:r>
           </a:p>
         </p:txBody>
@@ -14167,7 +14221,7 @@
                 </a:solidFill>
                 <a:latin typeface="Lexend"/>
               </a:rPr>
-              <a:t>A right triangle has legs of 6 m and 11 m (drawn turned on its side on the paper). How long is its hypotenuse, to the nearest tenth?</a:t>
+              <a:t>The right triangle on your paper has legs of 6 m and 11 m. How long is its hypotenuse, to the nearest tenth?</a:t>
             </a:r>
           </a:p>
         </p:txBody>
